--- a/artifacts/aegis-walkthrough.pptx
+++ b/artifacts/aegis-walkthrough.pptx
@@ -5442,7 +5442,7 @@
                 </a:solidFill>
                 <a:latin typeface="Arial"/>
               </a:rPr>
-              <a:t>A closed-loop adversarial system: the attacks it invents train the defence, and the defence's blind spots decide the next attack.</a:t>
+              <a:t>A closed-loop red-team / blue-team system: the attacks it invents train the defence, and the defence's blind spots decide the next attack.</a:t>
             </a:r>
           </a:p>
           <a:p>
@@ -9628,7 +9628,7 @@
                 </a:solidFill>
                 <a:latin typeface="Arial"/>
               </a:rPr>
-              <a:t>One loop, three stages, measured at every hand-off</a:t>
+              <a:t>Red team and blue team, wired into one loop</a:t>
             </a:r>
           </a:p>
         </p:txBody>
@@ -10650,7 +10650,7 @@
                 </a:solidFill>
                 <a:latin typeface="Arial"/>
               </a:rPr>
-              <a:t>The return path — what makes it a loop, not a pipeline</a:t>
+              <a:t>The return path — what makes red and blue one loop, not a pipeline</a:t>
             </a:r>
           </a:p>
         </p:txBody>
